--- a/images/bonsai/bonsai.pptx
+++ b/images/bonsai/bonsai.pptx
@@ -5,20 +5,21 @@
     <p:sldMasterId id="2147483648" r:id="rId1"/>
   </p:sldMasterIdLst>
   <p:sldIdLst>
-    <p:sldId id="260" r:id="rId2"/>
-    <p:sldId id="256" r:id="rId3"/>
-    <p:sldId id="257" r:id="rId4"/>
-    <p:sldId id="259" r:id="rId5"/>
-    <p:sldId id="258" r:id="rId6"/>
-    <p:sldId id="261" r:id="rId7"/>
-    <p:sldId id="262" r:id="rId8"/>
-    <p:sldId id="263" r:id="rId9"/>
-    <p:sldId id="264" r:id="rId10"/>
-    <p:sldId id="265" r:id="rId11"/>
-    <p:sldId id="266" r:id="rId12"/>
-    <p:sldId id="267" r:id="rId13"/>
-    <p:sldId id="268" r:id="rId14"/>
-    <p:sldId id="269" r:id="rId15"/>
+    <p:sldId id="270" r:id="rId2"/>
+    <p:sldId id="260" r:id="rId3"/>
+    <p:sldId id="256" r:id="rId4"/>
+    <p:sldId id="257" r:id="rId5"/>
+    <p:sldId id="259" r:id="rId6"/>
+    <p:sldId id="258" r:id="rId7"/>
+    <p:sldId id="261" r:id="rId8"/>
+    <p:sldId id="262" r:id="rId9"/>
+    <p:sldId id="263" r:id="rId10"/>
+    <p:sldId id="264" r:id="rId11"/>
+    <p:sldId id="265" r:id="rId12"/>
+    <p:sldId id="266" r:id="rId13"/>
+    <p:sldId id="267" r:id="rId14"/>
+    <p:sldId id="268" r:id="rId15"/>
+    <p:sldId id="269" r:id="rId16"/>
   </p:sldIdLst>
   <p:sldSz cx="12192000" cy="6858000"/>
   <p:notesSz cx="6858000" cy="9144000"/>
@@ -3350,62 +3351,12 @@
           <a:chExt cx="0" cy="0"/>
         </a:xfrm>
       </p:grpSpPr>
-      <p:sp>
-        <p:nvSpPr>
-          <p:cNvPr id="2" name="Title 1">
-            <a:extLst>
-              <a:ext uri="{FF2B5EF4-FFF2-40B4-BE49-F238E27FC236}">
-                <a16:creationId xmlns:a16="http://schemas.microsoft.com/office/drawing/2014/main" id="{8961D8B7-5044-4C8D-AB9B-55546BD5BF5F}"/>
-              </a:ext>
-            </a:extLst>
-          </p:cNvPr>
-          <p:cNvSpPr>
-            <a:spLocks noGrp="1"/>
-          </p:cNvSpPr>
-          <p:nvPr>
-            <p:ph type="ctrTitle"/>
-          </p:nvPr>
-        </p:nvSpPr>
-        <p:spPr/>
-        <p:txBody>
-          <a:bodyPr/>
-          <a:lstStyle/>
-          <a:p>
-            <a:endParaRPr lang="en-US"/>
-          </a:p>
-        </p:txBody>
-      </p:sp>
-      <p:sp>
-        <p:nvSpPr>
-          <p:cNvPr id="3" name="Subtitle 2">
-            <a:extLst>
-              <a:ext uri="{FF2B5EF4-FFF2-40B4-BE49-F238E27FC236}">
-                <a16:creationId xmlns:a16="http://schemas.microsoft.com/office/drawing/2014/main" id="{7D3CDF4C-CBB6-40EC-8017-21CE053A8AD7}"/>
-              </a:ext>
-            </a:extLst>
-          </p:cNvPr>
-          <p:cNvSpPr>
-            <a:spLocks noGrp="1"/>
-          </p:cNvSpPr>
-          <p:nvPr>
-            <p:ph type="subTitle" idx="1"/>
-          </p:nvPr>
-        </p:nvSpPr>
-        <p:spPr/>
-        <p:txBody>
-          <a:bodyPr/>
-          <a:lstStyle/>
-          <a:p>
-            <a:endParaRPr lang="en-US"/>
-          </a:p>
-        </p:txBody>
-      </p:sp>
       <p:pic>
         <p:nvPicPr>
           <p:cNvPr id="4" name="Picture 3">
             <a:extLst>
               <a:ext uri="{FF2B5EF4-FFF2-40B4-BE49-F238E27FC236}">
-                <a16:creationId xmlns:a16="http://schemas.microsoft.com/office/drawing/2014/main" id="{7122C64F-E7AD-4A81-B4B3-F02A5B0AC58C}"/>
+                <a16:creationId xmlns:a16="http://schemas.microsoft.com/office/drawing/2014/main" id="{5D213D36-21BD-4B82-9CC8-49F67304D7D4}"/>
               </a:ext>
             </a:extLst>
           </p:cNvPr>
@@ -3422,8 +3373,68 @@
         </p:blipFill>
         <p:spPr>
           <a:xfrm>
-            <a:off x="3247878" y="819016"/>
-            <a:ext cx="5696243" cy="5219968"/>
+            <a:off x="1161022" y="1137246"/>
+            <a:ext cx="3251200" cy="3251200"/>
+          </a:xfrm>
+          <a:prstGeom prst="rect">
+            <a:avLst/>
+          </a:prstGeom>
+        </p:spPr>
+      </p:pic>
+      <p:pic>
+        <p:nvPicPr>
+          <p:cNvPr id="5" name="Picture 4">
+            <a:extLst>
+              <a:ext uri="{FF2B5EF4-FFF2-40B4-BE49-F238E27FC236}">
+                <a16:creationId xmlns:a16="http://schemas.microsoft.com/office/drawing/2014/main" id="{3ED79986-0AA0-4F47-A7A1-57E7FB6C5634}"/>
+              </a:ext>
+            </a:extLst>
+          </p:cNvPr>
+          <p:cNvPicPr>
+            <a:picLocks noChangeAspect="1"/>
+          </p:cNvPicPr>
+          <p:nvPr/>
+        </p:nvPicPr>
+        <p:blipFill>
+          <a:blip r:embed="rId2"/>
+          <a:stretch>
+            <a:fillRect/>
+          </a:stretch>
+        </p:blipFill>
+        <p:spPr>
+          <a:xfrm>
+            <a:off x="5328985" y="1137246"/>
+            <a:ext cx="1219200" cy="1219200"/>
+          </a:xfrm>
+          <a:prstGeom prst="rect">
+            <a:avLst/>
+          </a:prstGeom>
+        </p:spPr>
+      </p:pic>
+      <p:pic>
+        <p:nvPicPr>
+          <p:cNvPr id="6" name="Picture 5">
+            <a:extLst>
+              <a:ext uri="{FF2B5EF4-FFF2-40B4-BE49-F238E27FC236}">
+                <a16:creationId xmlns:a16="http://schemas.microsoft.com/office/drawing/2014/main" id="{4D2B060F-68DB-44A5-A2CD-9B449D528B02}"/>
+              </a:ext>
+            </a:extLst>
+          </p:cNvPr>
+          <p:cNvPicPr>
+            <a:picLocks noChangeAspect="1"/>
+          </p:cNvPicPr>
+          <p:nvPr/>
+        </p:nvPicPr>
+        <p:blipFill>
+          <a:blip r:embed="rId2"/>
+          <a:stretch>
+            <a:fillRect/>
+          </a:stretch>
+        </p:blipFill>
+        <p:spPr>
+          <a:xfrm>
+            <a:off x="9405378" y="1137246"/>
+            <a:ext cx="1143000" cy="1143000"/>
           </a:xfrm>
           <a:prstGeom prst="rect">
             <a:avLst/>
@@ -3433,7 +3444,7 @@
     </p:spTree>
     <p:extLst>
       <p:ext uri="{BB962C8B-B14F-4D97-AF65-F5344CB8AC3E}">
-        <p14:creationId xmlns:p14="http://schemas.microsoft.com/office/powerpoint/2010/main" val="1206884781"/>
+        <p14:creationId xmlns:p14="http://schemas.microsoft.com/office/powerpoint/2010/main" val="1328348597"/>
       </p:ext>
     </p:extLst>
   </p:cSld>
@@ -3462,10 +3473,10 @@
       </p:grpSpPr>
       <p:pic>
         <p:nvPicPr>
-          <p:cNvPr id="6" name="Picture 5">
-            <a:extLst>
-              <a:ext uri="{FF2B5EF4-FFF2-40B4-BE49-F238E27FC236}">
-                <a16:creationId xmlns:a16="http://schemas.microsoft.com/office/drawing/2014/main" id="{A7FEB50C-10A0-4AE5-AB35-805F97BA5409}"/>
+          <p:cNvPr id="5" name="Picture 4">
+            <a:extLst>
+              <a:ext uri="{FF2B5EF4-FFF2-40B4-BE49-F238E27FC236}">
+                <a16:creationId xmlns:a16="http://schemas.microsoft.com/office/drawing/2014/main" id="{6A35CCF6-EAC3-4545-86AD-47DC7C8430A6}"/>
               </a:ext>
             </a:extLst>
           </p:cNvPr>
@@ -3482,8 +3493,8 @@
         </p:blipFill>
         <p:spPr>
           <a:xfrm>
-            <a:off x="3520942" y="5343388"/>
-            <a:ext cx="5150115" cy="5315223"/>
+            <a:off x="3851142" y="-5537335"/>
+            <a:ext cx="5150115" cy="5232669"/>
           </a:xfrm>
           <a:prstGeom prst="rect">
             <a:avLst/>
@@ -3492,10 +3503,10 @@
       </p:pic>
       <p:pic>
         <p:nvPicPr>
-          <p:cNvPr id="7" name="Picture 6">
-            <a:extLst>
-              <a:ext uri="{FF2B5EF4-FFF2-40B4-BE49-F238E27FC236}">
-                <a16:creationId xmlns:a16="http://schemas.microsoft.com/office/drawing/2014/main" id="{4342F479-09BA-46DB-A847-3089DFE1E92B}"/>
+          <p:cNvPr id="6" name="Picture 5">
+            <a:extLst>
+              <a:ext uri="{FF2B5EF4-FFF2-40B4-BE49-F238E27FC236}">
+                <a16:creationId xmlns:a16="http://schemas.microsoft.com/office/drawing/2014/main" id="{882FC0EA-5672-4DD8-81BA-B732ACEADD89}"/>
               </a:ext>
             </a:extLst>
           </p:cNvPr>
@@ -3512,8 +3523,8 @@
         </p:blipFill>
         <p:spPr>
           <a:xfrm>
-            <a:off x="3517767" y="-3968888"/>
-            <a:ext cx="5156465" cy="5346975"/>
+            <a:off x="-1387877" y="-164959"/>
+            <a:ext cx="5239019" cy="5169166"/>
           </a:xfrm>
           <a:prstGeom prst="rect">
             <a:avLst/>
@@ -3522,10 +3533,10 @@
       </p:pic>
       <p:pic>
         <p:nvPicPr>
-          <p:cNvPr id="8" name="Picture 7">
-            <a:extLst>
-              <a:ext uri="{FF2B5EF4-FFF2-40B4-BE49-F238E27FC236}">
-                <a16:creationId xmlns:a16="http://schemas.microsoft.com/office/drawing/2014/main" id="{B6430BB8-737A-416A-89BB-C35038EB0AB7}"/>
+          <p:cNvPr id="7" name="Picture 6">
+            <a:extLst>
+              <a:ext uri="{FF2B5EF4-FFF2-40B4-BE49-F238E27FC236}">
+                <a16:creationId xmlns:a16="http://schemas.microsoft.com/office/drawing/2014/main" id="{B5553593-9546-4C73-9909-9239A63F6226}"/>
               </a:ext>
             </a:extLst>
           </p:cNvPr>
@@ -3542,8 +3553,8 @@
         </p:blipFill>
         <p:spPr>
           <a:xfrm>
-            <a:off x="9102587" y="850767"/>
-            <a:ext cx="5366026" cy="5156465"/>
+            <a:off x="3851142" y="5004207"/>
+            <a:ext cx="5150115" cy="5219968"/>
           </a:xfrm>
           <a:prstGeom prst="rect">
             <a:avLst/>
@@ -3552,10 +3563,10 @@
       </p:pic>
       <p:pic>
         <p:nvPicPr>
-          <p:cNvPr id="9" name="Picture 8">
-            <a:extLst>
-              <a:ext uri="{FF2B5EF4-FFF2-40B4-BE49-F238E27FC236}">
-                <a16:creationId xmlns:a16="http://schemas.microsoft.com/office/drawing/2014/main" id="{0E182CDF-71EA-4F86-A6CD-55992B9FCE30}"/>
+          <p:cNvPr id="8" name="Picture 7">
+            <a:extLst>
+              <a:ext uri="{FF2B5EF4-FFF2-40B4-BE49-F238E27FC236}">
+                <a16:creationId xmlns:a16="http://schemas.microsoft.com/office/drawing/2014/main" id="{F30FF03F-322D-4C50-99DE-2B9EBF792379}"/>
               </a:ext>
             </a:extLst>
           </p:cNvPr>
@@ -3572,68 +3583,8 @@
         </p:blipFill>
         <p:spPr>
           <a:xfrm>
-            <a:off x="-9369569" y="-1641736"/>
-            <a:ext cx="5581937" cy="5194567"/>
-          </a:xfrm>
-          <a:prstGeom prst="rect">
-            <a:avLst/>
-          </a:prstGeom>
-        </p:spPr>
-      </p:pic>
-      <p:pic>
-        <p:nvPicPr>
-          <p:cNvPr id="10" name="Picture 9">
-            <a:extLst>
-              <a:ext uri="{FF2B5EF4-FFF2-40B4-BE49-F238E27FC236}">
-                <a16:creationId xmlns:a16="http://schemas.microsoft.com/office/drawing/2014/main" id="{6CB9E7A9-7857-4BAA-904E-160B2261DFC0}"/>
-              </a:ext>
-            </a:extLst>
-          </p:cNvPr>
-          <p:cNvPicPr>
-            <a:picLocks noChangeAspect="1"/>
-          </p:cNvPicPr>
-          <p:nvPr/>
-        </p:nvPicPr>
-        <p:blipFill>
-          <a:blip r:embed="rId6"/>
-          <a:stretch>
-            <a:fillRect/>
-          </a:stretch>
-        </p:blipFill>
-        <p:spPr>
-          <a:xfrm>
-            <a:off x="-2469120" y="850767"/>
-            <a:ext cx="5505733" cy="5404128"/>
-          </a:xfrm>
-          <a:prstGeom prst="rect">
-            <a:avLst/>
-          </a:prstGeom>
-        </p:spPr>
-      </p:pic>
-      <p:pic>
-        <p:nvPicPr>
-          <p:cNvPr id="11" name="Picture 10">
-            <a:extLst>
-              <a:ext uri="{FF2B5EF4-FFF2-40B4-BE49-F238E27FC236}">
-                <a16:creationId xmlns:a16="http://schemas.microsoft.com/office/drawing/2014/main" id="{30C0711F-5CBD-4755-AB53-EFFBF05E9940}"/>
-              </a:ext>
-            </a:extLst>
-          </p:cNvPr>
-          <p:cNvPicPr>
-            <a:picLocks noChangeAspect="1"/>
-          </p:cNvPicPr>
-          <p:nvPr/>
-        </p:nvPicPr>
-        <p:blipFill>
-          <a:blip r:embed="rId7"/>
-          <a:stretch>
-            <a:fillRect/>
-          </a:stretch>
-        </p:blipFill>
-        <p:spPr>
-          <a:xfrm>
-            <a:off x="-9248913" y="3625860"/>
-            <a:ext cx="5340624" cy="5258070"/>
+            <a:off x="9001257" y="-304666"/>
+            <a:ext cx="5721644" cy="5308873"/>
           </a:xfrm>
           <a:prstGeom prst="rect">
             <a:avLst/>
@@ -3643,7 +3594,7 @@
     </p:spTree>
     <p:extLst>
       <p:ext uri="{BB962C8B-B14F-4D97-AF65-F5344CB8AC3E}">
-        <p14:creationId xmlns:p14="http://schemas.microsoft.com/office/powerpoint/2010/main" val="1374877505"/>
+        <p14:creationId xmlns:p14="http://schemas.microsoft.com/office/powerpoint/2010/main" val="3519130227"/>
       </p:ext>
     </p:extLst>
   </p:cSld>
@@ -3672,6 +3623,216 @@
       </p:grpSpPr>
       <p:pic>
         <p:nvPicPr>
+          <p:cNvPr id="6" name="Picture 5">
+            <a:extLst>
+              <a:ext uri="{FF2B5EF4-FFF2-40B4-BE49-F238E27FC236}">
+                <a16:creationId xmlns:a16="http://schemas.microsoft.com/office/drawing/2014/main" id="{A7FEB50C-10A0-4AE5-AB35-805F97BA5409}"/>
+              </a:ext>
+            </a:extLst>
+          </p:cNvPr>
+          <p:cNvPicPr>
+            <a:picLocks noChangeAspect="1"/>
+          </p:cNvPicPr>
+          <p:nvPr/>
+        </p:nvPicPr>
+        <p:blipFill>
+          <a:blip r:embed="rId2"/>
+          <a:stretch>
+            <a:fillRect/>
+          </a:stretch>
+        </p:blipFill>
+        <p:spPr>
+          <a:xfrm>
+            <a:off x="3520942" y="5343388"/>
+            <a:ext cx="5150115" cy="5315223"/>
+          </a:xfrm>
+          <a:prstGeom prst="rect">
+            <a:avLst/>
+          </a:prstGeom>
+        </p:spPr>
+      </p:pic>
+      <p:pic>
+        <p:nvPicPr>
+          <p:cNvPr id="7" name="Picture 6">
+            <a:extLst>
+              <a:ext uri="{FF2B5EF4-FFF2-40B4-BE49-F238E27FC236}">
+                <a16:creationId xmlns:a16="http://schemas.microsoft.com/office/drawing/2014/main" id="{4342F479-09BA-46DB-A847-3089DFE1E92B}"/>
+              </a:ext>
+            </a:extLst>
+          </p:cNvPr>
+          <p:cNvPicPr>
+            <a:picLocks noChangeAspect="1"/>
+          </p:cNvPicPr>
+          <p:nvPr/>
+        </p:nvPicPr>
+        <p:blipFill>
+          <a:blip r:embed="rId3"/>
+          <a:stretch>
+            <a:fillRect/>
+          </a:stretch>
+        </p:blipFill>
+        <p:spPr>
+          <a:xfrm>
+            <a:off x="3517767" y="-3968888"/>
+            <a:ext cx="5156465" cy="5346975"/>
+          </a:xfrm>
+          <a:prstGeom prst="rect">
+            <a:avLst/>
+          </a:prstGeom>
+        </p:spPr>
+      </p:pic>
+      <p:pic>
+        <p:nvPicPr>
+          <p:cNvPr id="8" name="Picture 7">
+            <a:extLst>
+              <a:ext uri="{FF2B5EF4-FFF2-40B4-BE49-F238E27FC236}">
+                <a16:creationId xmlns:a16="http://schemas.microsoft.com/office/drawing/2014/main" id="{B6430BB8-737A-416A-89BB-C35038EB0AB7}"/>
+              </a:ext>
+            </a:extLst>
+          </p:cNvPr>
+          <p:cNvPicPr>
+            <a:picLocks noChangeAspect="1"/>
+          </p:cNvPicPr>
+          <p:nvPr/>
+        </p:nvPicPr>
+        <p:blipFill>
+          <a:blip r:embed="rId4"/>
+          <a:stretch>
+            <a:fillRect/>
+          </a:stretch>
+        </p:blipFill>
+        <p:spPr>
+          <a:xfrm>
+            <a:off x="9102587" y="850767"/>
+            <a:ext cx="5366026" cy="5156465"/>
+          </a:xfrm>
+          <a:prstGeom prst="rect">
+            <a:avLst/>
+          </a:prstGeom>
+        </p:spPr>
+      </p:pic>
+      <p:pic>
+        <p:nvPicPr>
+          <p:cNvPr id="9" name="Picture 8">
+            <a:extLst>
+              <a:ext uri="{FF2B5EF4-FFF2-40B4-BE49-F238E27FC236}">
+                <a16:creationId xmlns:a16="http://schemas.microsoft.com/office/drawing/2014/main" id="{0E182CDF-71EA-4F86-A6CD-55992B9FCE30}"/>
+              </a:ext>
+            </a:extLst>
+          </p:cNvPr>
+          <p:cNvPicPr>
+            <a:picLocks noChangeAspect="1"/>
+          </p:cNvPicPr>
+          <p:nvPr/>
+        </p:nvPicPr>
+        <p:blipFill>
+          <a:blip r:embed="rId5"/>
+          <a:stretch>
+            <a:fillRect/>
+          </a:stretch>
+        </p:blipFill>
+        <p:spPr>
+          <a:xfrm>
+            <a:off x="-9369569" y="-1641736"/>
+            <a:ext cx="5581937" cy="5194567"/>
+          </a:xfrm>
+          <a:prstGeom prst="rect">
+            <a:avLst/>
+          </a:prstGeom>
+        </p:spPr>
+      </p:pic>
+      <p:pic>
+        <p:nvPicPr>
+          <p:cNvPr id="10" name="Picture 9">
+            <a:extLst>
+              <a:ext uri="{FF2B5EF4-FFF2-40B4-BE49-F238E27FC236}">
+                <a16:creationId xmlns:a16="http://schemas.microsoft.com/office/drawing/2014/main" id="{6CB9E7A9-7857-4BAA-904E-160B2261DFC0}"/>
+              </a:ext>
+            </a:extLst>
+          </p:cNvPr>
+          <p:cNvPicPr>
+            <a:picLocks noChangeAspect="1"/>
+          </p:cNvPicPr>
+          <p:nvPr/>
+        </p:nvPicPr>
+        <p:blipFill>
+          <a:blip r:embed="rId6"/>
+          <a:stretch>
+            <a:fillRect/>
+          </a:stretch>
+        </p:blipFill>
+        <p:spPr>
+          <a:xfrm>
+            <a:off x="-2469120" y="850767"/>
+            <a:ext cx="5505733" cy="5404128"/>
+          </a:xfrm>
+          <a:prstGeom prst="rect">
+            <a:avLst/>
+          </a:prstGeom>
+        </p:spPr>
+      </p:pic>
+      <p:pic>
+        <p:nvPicPr>
+          <p:cNvPr id="11" name="Picture 10">
+            <a:extLst>
+              <a:ext uri="{FF2B5EF4-FFF2-40B4-BE49-F238E27FC236}">
+                <a16:creationId xmlns:a16="http://schemas.microsoft.com/office/drawing/2014/main" id="{30C0711F-5CBD-4755-AB53-EFFBF05E9940}"/>
+              </a:ext>
+            </a:extLst>
+          </p:cNvPr>
+          <p:cNvPicPr>
+            <a:picLocks noChangeAspect="1"/>
+          </p:cNvPicPr>
+          <p:nvPr/>
+        </p:nvPicPr>
+        <p:blipFill>
+          <a:blip r:embed="rId7"/>
+          <a:stretch>
+            <a:fillRect/>
+          </a:stretch>
+        </p:blipFill>
+        <p:spPr>
+          <a:xfrm>
+            <a:off x="-9248913" y="3625860"/>
+            <a:ext cx="5340624" cy="5258070"/>
+          </a:xfrm>
+          <a:prstGeom prst="rect">
+            <a:avLst/>
+          </a:prstGeom>
+        </p:spPr>
+      </p:pic>
+    </p:spTree>
+    <p:extLst>
+      <p:ext uri="{BB962C8B-B14F-4D97-AF65-F5344CB8AC3E}">
+        <p14:creationId xmlns:p14="http://schemas.microsoft.com/office/powerpoint/2010/main" val="1374877505"/>
+      </p:ext>
+    </p:extLst>
+  </p:cSld>
+  <p:clrMapOvr>
+    <a:masterClrMapping/>
+  </p:clrMapOvr>
+</p:sld>
+</file>
+
+<file path=ppt/slides/slide12.xml><?xml version="1.0" encoding="utf-8"?>
+<p:sld xmlns:a="http://schemas.openxmlformats.org/drawingml/2006/main" xmlns:r="http://schemas.openxmlformats.org/officeDocument/2006/relationships" xmlns:p="http://schemas.openxmlformats.org/presentationml/2006/main">
+  <p:cSld>
+    <p:spTree>
+      <p:nvGrpSpPr>
+        <p:cNvPr id="1" name=""/>
+        <p:cNvGrpSpPr/>
+        <p:nvPr/>
+      </p:nvGrpSpPr>
+      <p:grpSpPr>
+        <a:xfrm>
+          <a:off x="0" y="0"/>
+          <a:ext cx="0" cy="0"/>
+          <a:chOff x="0" y="0"/>
+          <a:chExt cx="0" cy="0"/>
+        </a:xfrm>
+      </p:grpSpPr>
+      <p:pic>
+        <p:nvPicPr>
           <p:cNvPr id="10" name="Picture 9">
             <a:extLst>
               <a:ext uri="{FF2B5EF4-FFF2-40B4-BE49-F238E27FC236}">
@@ -3803,7 +3964,7 @@
 </p:sld>
 </file>
 
-<file path=ppt/slides/slide12.xml><?xml version="1.0" encoding="utf-8"?>
+<file path=ppt/slides/slide13.xml><?xml version="1.0" encoding="utf-8"?>
 <p:sld xmlns:a="http://schemas.openxmlformats.org/drawingml/2006/main" xmlns:r="http://schemas.openxmlformats.org/officeDocument/2006/relationships" xmlns:p="http://schemas.openxmlformats.org/presentationml/2006/main">
   <p:cSld>
     <p:spTree>
@@ -6311,7 +6472,7 @@
 </p:sld>
 </file>
 
-<file path=ppt/slides/slide13.xml><?xml version="1.0" encoding="utf-8"?>
+<file path=ppt/slides/slide14.xml><?xml version="1.0" encoding="utf-8"?>
 <p:sld xmlns:a="http://schemas.openxmlformats.org/drawingml/2006/main" xmlns:r="http://schemas.openxmlformats.org/officeDocument/2006/relationships" xmlns:p="http://schemas.openxmlformats.org/presentationml/2006/main">
   <p:cSld>
     <p:spTree>
@@ -6405,7 +6566,7 @@
 </p:sld>
 </file>
 
-<file path=ppt/slides/slide14.xml><?xml version="1.0" encoding="utf-8"?>
+<file path=ppt/slides/slide15.xml><?xml version="1.0" encoding="utf-8"?>
 <p:sld xmlns:a="http://schemas.openxmlformats.org/drawingml/2006/main" xmlns:r="http://schemas.openxmlformats.org/officeDocument/2006/relationships" xmlns:p="http://schemas.openxmlformats.org/presentationml/2006/main">
   <p:cSld>
     <p:spTree>
@@ -6526,6 +6687,116 @@
       </p:grpSpPr>
       <p:sp>
         <p:nvSpPr>
+          <p:cNvPr id="2" name="Title 1">
+            <a:extLst>
+              <a:ext uri="{FF2B5EF4-FFF2-40B4-BE49-F238E27FC236}">
+                <a16:creationId xmlns:a16="http://schemas.microsoft.com/office/drawing/2014/main" id="{8961D8B7-5044-4C8D-AB9B-55546BD5BF5F}"/>
+              </a:ext>
+            </a:extLst>
+          </p:cNvPr>
+          <p:cNvSpPr>
+            <a:spLocks noGrp="1"/>
+          </p:cNvSpPr>
+          <p:nvPr>
+            <p:ph type="ctrTitle"/>
+          </p:nvPr>
+        </p:nvSpPr>
+        <p:spPr/>
+        <p:txBody>
+          <a:bodyPr/>
+          <a:lstStyle/>
+          <a:p>
+            <a:endParaRPr lang="en-US"/>
+          </a:p>
+        </p:txBody>
+      </p:sp>
+      <p:sp>
+        <p:nvSpPr>
+          <p:cNvPr id="3" name="Subtitle 2">
+            <a:extLst>
+              <a:ext uri="{FF2B5EF4-FFF2-40B4-BE49-F238E27FC236}">
+                <a16:creationId xmlns:a16="http://schemas.microsoft.com/office/drawing/2014/main" id="{7D3CDF4C-CBB6-40EC-8017-21CE053A8AD7}"/>
+              </a:ext>
+            </a:extLst>
+          </p:cNvPr>
+          <p:cNvSpPr>
+            <a:spLocks noGrp="1"/>
+          </p:cNvSpPr>
+          <p:nvPr>
+            <p:ph type="subTitle" idx="1"/>
+          </p:nvPr>
+        </p:nvSpPr>
+        <p:spPr/>
+        <p:txBody>
+          <a:bodyPr/>
+          <a:lstStyle/>
+          <a:p>
+            <a:endParaRPr lang="en-US"/>
+          </a:p>
+        </p:txBody>
+      </p:sp>
+      <p:pic>
+        <p:nvPicPr>
+          <p:cNvPr id="4" name="Picture 3">
+            <a:extLst>
+              <a:ext uri="{FF2B5EF4-FFF2-40B4-BE49-F238E27FC236}">
+                <a16:creationId xmlns:a16="http://schemas.microsoft.com/office/drawing/2014/main" id="{7122C64F-E7AD-4A81-B4B3-F02A5B0AC58C}"/>
+              </a:ext>
+            </a:extLst>
+          </p:cNvPr>
+          <p:cNvPicPr>
+            <a:picLocks noChangeAspect="1"/>
+          </p:cNvPicPr>
+          <p:nvPr/>
+        </p:nvPicPr>
+        <p:blipFill>
+          <a:blip r:embed="rId2"/>
+          <a:stretch>
+            <a:fillRect/>
+          </a:stretch>
+        </p:blipFill>
+        <p:spPr>
+          <a:xfrm>
+            <a:off x="3247878" y="819016"/>
+            <a:ext cx="5696243" cy="5219968"/>
+          </a:xfrm>
+          <a:prstGeom prst="rect">
+            <a:avLst/>
+          </a:prstGeom>
+        </p:spPr>
+      </p:pic>
+    </p:spTree>
+    <p:extLst>
+      <p:ext uri="{BB962C8B-B14F-4D97-AF65-F5344CB8AC3E}">
+        <p14:creationId xmlns:p14="http://schemas.microsoft.com/office/powerpoint/2010/main" val="1206884781"/>
+      </p:ext>
+    </p:extLst>
+  </p:cSld>
+  <p:clrMapOvr>
+    <a:masterClrMapping/>
+  </p:clrMapOvr>
+</p:sld>
+</file>
+
+<file path=ppt/slides/slide3.xml><?xml version="1.0" encoding="utf-8"?>
+<p:sld xmlns:a="http://schemas.openxmlformats.org/drawingml/2006/main" xmlns:r="http://schemas.openxmlformats.org/officeDocument/2006/relationships" xmlns:p="http://schemas.openxmlformats.org/presentationml/2006/main">
+  <p:cSld>
+    <p:spTree>
+      <p:nvGrpSpPr>
+        <p:cNvPr id="1" name=""/>
+        <p:cNvGrpSpPr/>
+        <p:nvPr/>
+      </p:nvGrpSpPr>
+      <p:grpSpPr>
+        <a:xfrm>
+          <a:off x="0" y="0"/>
+          <a:ext cx="0" cy="0"/>
+          <a:chOff x="0" y="0"/>
+          <a:chExt cx="0" cy="0"/>
+        </a:xfrm>
+      </p:grpSpPr>
+      <p:sp>
+        <p:nvSpPr>
           <p:cNvPr id="5" name="Rectangle 4">
             <a:extLst>
               <a:ext uri="{FF2B5EF4-FFF2-40B4-BE49-F238E27FC236}">
@@ -6721,7 +6992,7 @@
 </p:sld>
 </file>
 
-<file path=ppt/slides/slide3.xml><?xml version="1.0" encoding="utf-8"?>
+<file path=ppt/slides/slide4.xml><?xml version="1.0" encoding="utf-8"?>
 <p:sld xmlns:a="http://schemas.openxmlformats.org/drawingml/2006/main" xmlns:r="http://schemas.openxmlformats.org/officeDocument/2006/relationships" xmlns:p="http://schemas.openxmlformats.org/presentationml/2006/main">
   <p:cSld>
     <p:spTree>
@@ -7158,7 +7429,7 @@
 </p:sld>
 </file>
 
-<file path=ppt/slides/slide4.xml><?xml version="1.0" encoding="utf-8"?>
+<file path=ppt/slides/slide5.xml><?xml version="1.0" encoding="utf-8"?>
 <p:sld xmlns:a="http://schemas.openxmlformats.org/drawingml/2006/main" xmlns:r="http://schemas.openxmlformats.org/officeDocument/2006/relationships" xmlns:p="http://schemas.openxmlformats.org/presentationml/2006/main">
   <p:cSld>
     <p:spTree>
@@ -7419,7 +7690,7 @@
 </p:sld>
 </file>
 
-<file path=ppt/slides/slide5.xml><?xml version="1.0" encoding="utf-8"?>
+<file path=ppt/slides/slide6.xml><?xml version="1.0" encoding="utf-8"?>
 <p:sld xmlns:a="http://schemas.openxmlformats.org/drawingml/2006/main" xmlns:r="http://schemas.openxmlformats.org/officeDocument/2006/relationships" xmlns:p="http://schemas.openxmlformats.org/presentationml/2006/main">
   <p:cSld>
     <p:spTree>
@@ -8198,7 +8469,7 @@
 </p:sld>
 </file>
 
-<file path=ppt/slides/slide6.xml><?xml version="1.0" encoding="utf-8"?>
+<file path=ppt/slides/slide7.xml><?xml version="1.0" encoding="utf-8"?>
 <p:sld xmlns:a="http://schemas.openxmlformats.org/drawingml/2006/main" xmlns:r="http://schemas.openxmlformats.org/officeDocument/2006/relationships" xmlns:p="http://schemas.openxmlformats.org/presentationml/2006/main">
   <p:cSld>
     <p:spTree>
@@ -8249,366 +8520,6 @@
     <p:extLst>
       <p:ext uri="{BB962C8B-B14F-4D97-AF65-F5344CB8AC3E}">
         <p14:creationId xmlns:p14="http://schemas.microsoft.com/office/powerpoint/2010/main" val="1041844662"/>
-      </p:ext>
-    </p:extLst>
-  </p:cSld>
-  <p:clrMapOvr>
-    <a:masterClrMapping/>
-  </p:clrMapOvr>
-</p:sld>
-</file>
-
-<file path=ppt/slides/slide7.xml><?xml version="1.0" encoding="utf-8"?>
-<p:sld xmlns:a="http://schemas.openxmlformats.org/drawingml/2006/main" xmlns:r="http://schemas.openxmlformats.org/officeDocument/2006/relationships" xmlns:p="http://schemas.openxmlformats.org/presentationml/2006/main">
-  <p:cSld>
-    <p:spTree>
-      <p:nvGrpSpPr>
-        <p:cNvPr id="1" name=""/>
-        <p:cNvGrpSpPr/>
-        <p:nvPr/>
-      </p:nvGrpSpPr>
-      <p:grpSpPr>
-        <a:xfrm>
-          <a:off x="0" y="0"/>
-          <a:ext cx="0" cy="0"/>
-          <a:chOff x="0" y="0"/>
-          <a:chExt cx="0" cy="0"/>
-        </a:xfrm>
-      </p:grpSpPr>
-      <p:pic>
-        <p:nvPicPr>
-          <p:cNvPr id="5" name="Picture 4">
-            <a:extLst>
-              <a:ext uri="{FF2B5EF4-FFF2-40B4-BE49-F238E27FC236}">
-                <a16:creationId xmlns:a16="http://schemas.microsoft.com/office/drawing/2014/main" id="{4EA77CBD-6510-4BFC-9F4B-5FED5CB0C313}"/>
-              </a:ext>
-            </a:extLst>
-          </p:cNvPr>
-          <p:cNvPicPr>
-            <a:picLocks noChangeAspect="1"/>
-          </p:cNvPicPr>
-          <p:nvPr/>
-        </p:nvPicPr>
-        <p:blipFill>
-          <a:blip r:embed="rId2"/>
-          <a:stretch>
-            <a:fillRect/>
-          </a:stretch>
-        </p:blipFill>
-        <p:spPr>
-          <a:xfrm>
-            <a:off x="-2101449" y="-10793841"/>
-            <a:ext cx="1667763" cy="1675724"/>
-          </a:xfrm>
-          <a:prstGeom prst="rect">
-            <a:avLst/>
-          </a:prstGeom>
-        </p:spPr>
-      </p:pic>
-      <p:pic>
-        <p:nvPicPr>
-          <p:cNvPr id="6" name="Picture 5">
-            <a:extLst>
-              <a:ext uri="{FF2B5EF4-FFF2-40B4-BE49-F238E27FC236}">
-                <a16:creationId xmlns:a16="http://schemas.microsoft.com/office/drawing/2014/main" id="{EEC7AC61-3D1E-4517-BB6D-37207615070B}"/>
-              </a:ext>
-            </a:extLst>
-          </p:cNvPr>
-          <p:cNvPicPr>
-            <a:picLocks noChangeAspect="1"/>
-          </p:cNvPicPr>
-          <p:nvPr/>
-        </p:nvPicPr>
-        <p:blipFill>
-          <a:blip r:embed="rId3"/>
-          <a:stretch>
-            <a:fillRect/>
-          </a:stretch>
-        </p:blipFill>
-        <p:spPr>
-          <a:xfrm>
-            <a:off x="-2101449" y="-8632968"/>
-            <a:ext cx="1731448" cy="1655822"/>
-          </a:xfrm>
-          <a:prstGeom prst="rect">
-            <a:avLst/>
-          </a:prstGeom>
-        </p:spPr>
-      </p:pic>
-      <p:pic>
-        <p:nvPicPr>
-          <p:cNvPr id="9" name="Picture 8">
-            <a:extLst>
-              <a:ext uri="{FF2B5EF4-FFF2-40B4-BE49-F238E27FC236}">
-                <a16:creationId xmlns:a16="http://schemas.microsoft.com/office/drawing/2014/main" id="{D07B7784-0404-4E89-BFF8-CA73F8907254}"/>
-              </a:ext>
-            </a:extLst>
-          </p:cNvPr>
-          <p:cNvPicPr>
-            <a:picLocks noChangeAspect="1"/>
-          </p:cNvPicPr>
-          <p:nvPr/>
-        </p:nvPicPr>
-        <p:blipFill>
-          <a:blip r:embed="rId4"/>
-          <a:stretch>
-            <a:fillRect/>
-          </a:stretch>
-        </p:blipFill>
-        <p:spPr>
-          <a:xfrm>
-            <a:off x="372446" y="-10793841"/>
-            <a:ext cx="5505733" cy="5435879"/>
-          </a:xfrm>
-          <a:prstGeom prst="rect">
-            <a:avLst/>
-          </a:prstGeom>
-        </p:spPr>
-      </p:pic>
-      <p:pic>
-        <p:nvPicPr>
-          <p:cNvPr id="10" name="Picture 9">
-            <a:extLst>
-              <a:ext uri="{FF2B5EF4-FFF2-40B4-BE49-F238E27FC236}">
-                <a16:creationId xmlns:a16="http://schemas.microsoft.com/office/drawing/2014/main" id="{E60C0387-B2EA-463C-A29C-D56EDE935351}"/>
-              </a:ext>
-            </a:extLst>
-          </p:cNvPr>
-          <p:cNvPicPr>
-            <a:picLocks noChangeAspect="1"/>
-          </p:cNvPicPr>
-          <p:nvPr/>
-        </p:nvPicPr>
-        <p:blipFill>
-          <a:blip r:embed="rId5"/>
-          <a:stretch>
-            <a:fillRect/>
-          </a:stretch>
-        </p:blipFill>
-        <p:spPr>
-          <a:xfrm>
-            <a:off x="12564317" y="-10793841"/>
-            <a:ext cx="5499383" cy="5156465"/>
-          </a:xfrm>
-          <a:prstGeom prst="rect">
-            <a:avLst/>
-          </a:prstGeom>
-        </p:spPr>
-      </p:pic>
-      <p:pic>
-        <p:nvPicPr>
-          <p:cNvPr id="13" name="Picture 12">
-            <a:extLst>
-              <a:ext uri="{FF2B5EF4-FFF2-40B4-BE49-F238E27FC236}">
-                <a16:creationId xmlns:a16="http://schemas.microsoft.com/office/drawing/2014/main" id="{E938627B-7830-4C55-8D97-74F53CB5CB34}"/>
-              </a:ext>
-            </a:extLst>
-          </p:cNvPr>
-          <p:cNvPicPr>
-            <a:picLocks noChangeAspect="1"/>
-          </p:cNvPicPr>
-          <p:nvPr/>
-        </p:nvPicPr>
-        <p:blipFill>
-          <a:blip r:embed="rId6"/>
-          <a:stretch>
-            <a:fillRect/>
-          </a:stretch>
-        </p:blipFill>
-        <p:spPr>
-          <a:xfrm>
-            <a:off x="6096000" y="-7805057"/>
-            <a:ext cx="5689892" cy="5486682"/>
-          </a:xfrm>
-          <a:prstGeom prst="rect">
-            <a:avLst/>
-          </a:prstGeom>
-        </p:spPr>
-      </p:pic>
-      <p:pic>
-        <p:nvPicPr>
-          <p:cNvPr id="14" name="Picture 13">
-            <a:extLst>
-              <a:ext uri="{FF2B5EF4-FFF2-40B4-BE49-F238E27FC236}">
-                <a16:creationId xmlns:a16="http://schemas.microsoft.com/office/drawing/2014/main" id="{B818D32E-41C7-4DCB-9F86-7C837750E7C1}"/>
-              </a:ext>
-            </a:extLst>
-          </p:cNvPr>
-          <p:cNvPicPr>
-            <a:picLocks noChangeAspect="1"/>
-          </p:cNvPicPr>
-          <p:nvPr/>
-        </p:nvPicPr>
-        <p:blipFill>
-          <a:blip r:embed="rId7"/>
-          <a:stretch>
-            <a:fillRect/>
-          </a:stretch>
-        </p:blipFill>
-        <p:spPr>
-          <a:xfrm>
-            <a:off x="5750888" y="11883547"/>
-            <a:ext cx="5575587" cy="5473981"/>
-          </a:xfrm>
-          <a:prstGeom prst="rect">
-            <a:avLst/>
-          </a:prstGeom>
-        </p:spPr>
-      </p:pic>
-      <p:pic>
-        <p:nvPicPr>
-          <p:cNvPr id="15" name="Picture 14">
-            <a:extLst>
-              <a:ext uri="{FF2B5EF4-FFF2-40B4-BE49-F238E27FC236}">
-                <a16:creationId xmlns:a16="http://schemas.microsoft.com/office/drawing/2014/main" id="{5128551D-0D10-4C63-8CD9-55D2954145C3}"/>
-              </a:ext>
-            </a:extLst>
-          </p:cNvPr>
-          <p:cNvPicPr>
-            <a:picLocks noChangeAspect="1"/>
-          </p:cNvPicPr>
-          <p:nvPr/>
-        </p:nvPicPr>
-        <p:blipFill>
-          <a:blip r:embed="rId6"/>
-          <a:stretch>
-            <a:fillRect/>
-          </a:stretch>
-        </p:blipFill>
-        <p:spPr>
-          <a:xfrm>
-            <a:off x="6096000" y="-13400596"/>
-            <a:ext cx="5689892" cy="5486682"/>
-          </a:xfrm>
-          <a:prstGeom prst="rect">
-            <a:avLst/>
-          </a:prstGeom>
-        </p:spPr>
-      </p:pic>
-      <p:pic>
-        <p:nvPicPr>
-          <p:cNvPr id="16" name="Picture 15">
-            <a:extLst>
-              <a:ext uri="{FF2B5EF4-FFF2-40B4-BE49-F238E27FC236}">
-                <a16:creationId xmlns:a16="http://schemas.microsoft.com/office/drawing/2014/main" id="{406777F3-B226-49A0-8475-2F7B6C88438E}"/>
-              </a:ext>
-            </a:extLst>
-          </p:cNvPr>
-          <p:cNvPicPr>
-            <a:picLocks noChangeAspect="1"/>
-          </p:cNvPicPr>
-          <p:nvPr/>
-        </p:nvPicPr>
-        <p:blipFill>
-          <a:blip r:embed="rId8"/>
-          <a:stretch>
-            <a:fillRect/>
-          </a:stretch>
-        </p:blipFill>
-        <p:spPr>
-          <a:xfrm>
-            <a:off x="11326475" y="6882786"/>
-            <a:ext cx="5791498" cy="5277121"/>
-          </a:xfrm>
-          <a:prstGeom prst="rect">
-            <a:avLst/>
-          </a:prstGeom>
-        </p:spPr>
-      </p:pic>
-      <p:pic>
-        <p:nvPicPr>
-          <p:cNvPr id="17" name="Picture 16">
-            <a:extLst>
-              <a:ext uri="{FF2B5EF4-FFF2-40B4-BE49-F238E27FC236}">
-                <a16:creationId xmlns:a16="http://schemas.microsoft.com/office/drawing/2014/main" id="{0E74CD7F-B46B-44FA-A600-D6D32D657E70}"/>
-              </a:ext>
-            </a:extLst>
-          </p:cNvPr>
-          <p:cNvPicPr>
-            <a:picLocks noChangeAspect="1"/>
-          </p:cNvPicPr>
-          <p:nvPr/>
-        </p:nvPicPr>
-        <p:blipFill>
-          <a:blip r:embed="rId9"/>
-          <a:stretch>
-            <a:fillRect/>
-          </a:stretch>
-        </p:blipFill>
-        <p:spPr>
-          <a:xfrm>
-            <a:off x="-59661" y="6858000"/>
-            <a:ext cx="5810549" cy="5575587"/>
-          </a:xfrm>
-          <a:prstGeom prst="rect">
-            <a:avLst/>
-          </a:prstGeom>
-        </p:spPr>
-      </p:pic>
-      <p:pic>
-        <p:nvPicPr>
-          <p:cNvPr id="18" name="Picture 17">
-            <a:extLst>
-              <a:ext uri="{FF2B5EF4-FFF2-40B4-BE49-F238E27FC236}">
-                <a16:creationId xmlns:a16="http://schemas.microsoft.com/office/drawing/2014/main" id="{5DDD86D8-265C-426D-8FCE-49A53D7EC1E7}"/>
-              </a:ext>
-            </a:extLst>
-          </p:cNvPr>
-          <p:cNvPicPr>
-            <a:picLocks noChangeAspect="1"/>
-          </p:cNvPicPr>
-          <p:nvPr/>
-        </p:nvPicPr>
-        <p:blipFill>
-          <a:blip r:embed="rId10"/>
-          <a:stretch>
-            <a:fillRect/>
-          </a:stretch>
-        </p:blipFill>
-        <p:spPr>
-          <a:xfrm>
-            <a:off x="3058349" y="-521595"/>
-            <a:ext cx="5385077" cy="5188217"/>
-          </a:xfrm>
-          <a:prstGeom prst="rect">
-            <a:avLst/>
-          </a:prstGeom>
-        </p:spPr>
-      </p:pic>
-      <p:pic>
-        <p:nvPicPr>
-          <p:cNvPr id="19" name="Picture 18">
-            <a:extLst>
-              <a:ext uri="{FF2B5EF4-FFF2-40B4-BE49-F238E27FC236}">
-                <a16:creationId xmlns:a16="http://schemas.microsoft.com/office/drawing/2014/main" id="{8494B7A6-A44A-49A1-84FD-437DBDF6E633}"/>
-              </a:ext>
-            </a:extLst>
-          </p:cNvPr>
-          <p:cNvPicPr>
-            <a:picLocks noChangeAspect="1"/>
-          </p:cNvPicPr>
-          <p:nvPr/>
-        </p:nvPicPr>
-        <p:blipFill>
-          <a:blip r:embed="rId11"/>
-          <a:stretch>
-            <a:fillRect/>
-          </a:stretch>
-        </p:blipFill>
-        <p:spPr>
-          <a:xfrm>
-            <a:off x="8691089" y="-569222"/>
-            <a:ext cx="5270771" cy="5283472"/>
-          </a:xfrm>
-          <a:prstGeom prst="rect">
-            <a:avLst/>
-          </a:prstGeom>
-        </p:spPr>
-      </p:pic>
-    </p:spTree>
-    <p:extLst>
-      <p:ext uri="{BB962C8B-B14F-4D97-AF65-F5344CB8AC3E}">
-        <p14:creationId xmlns:p14="http://schemas.microsoft.com/office/powerpoint/2010/main" val="2778866111"/>
       </p:ext>
     </p:extLst>
   </p:cSld>
@@ -8637,10 +8548,10 @@
       </p:grpSpPr>
       <p:pic>
         <p:nvPicPr>
-          <p:cNvPr id="14" name="Picture 13">
-            <a:extLst>
-              <a:ext uri="{FF2B5EF4-FFF2-40B4-BE49-F238E27FC236}">
-                <a16:creationId xmlns:a16="http://schemas.microsoft.com/office/drawing/2014/main" id="{BACD19A8-A57D-419C-9767-7966FB3A95FD}"/>
+          <p:cNvPr id="5" name="Picture 4">
+            <a:extLst>
+              <a:ext uri="{FF2B5EF4-FFF2-40B4-BE49-F238E27FC236}">
+                <a16:creationId xmlns:a16="http://schemas.microsoft.com/office/drawing/2014/main" id="{4EA77CBD-6510-4BFC-9F4B-5FED5CB0C313}"/>
               </a:ext>
             </a:extLst>
           </p:cNvPr>
@@ -8657,8 +8568,8 @@
         </p:blipFill>
         <p:spPr>
           <a:xfrm>
-            <a:off x="-965877" y="1498741"/>
-            <a:ext cx="5239019" cy="5169166"/>
+            <a:off x="-2101449" y="-10793841"/>
+            <a:ext cx="1667763" cy="1675724"/>
           </a:xfrm>
           <a:prstGeom prst="rect">
             <a:avLst/>
@@ -8667,10 +8578,10 @@
       </p:pic>
       <p:pic>
         <p:nvPicPr>
-          <p:cNvPr id="15" name="Picture 14">
-            <a:extLst>
-              <a:ext uri="{FF2B5EF4-FFF2-40B4-BE49-F238E27FC236}">
-                <a16:creationId xmlns:a16="http://schemas.microsoft.com/office/drawing/2014/main" id="{69573D0E-52B1-41CC-A3D8-234E8AED5089}"/>
+          <p:cNvPr id="6" name="Picture 5">
+            <a:extLst>
+              <a:ext uri="{FF2B5EF4-FFF2-40B4-BE49-F238E27FC236}">
+                <a16:creationId xmlns:a16="http://schemas.microsoft.com/office/drawing/2014/main" id="{EEC7AC61-3D1E-4517-BB6D-37207615070B}"/>
               </a:ext>
             </a:extLst>
           </p:cNvPr>
@@ -8687,8 +8598,8 @@
         </p:blipFill>
         <p:spPr>
           <a:xfrm>
-            <a:off x="4273142" y="6667907"/>
-            <a:ext cx="5150115" cy="5219968"/>
+            <a:off x="-2101449" y="-8632968"/>
+            <a:ext cx="1731448" cy="1655822"/>
           </a:xfrm>
           <a:prstGeom prst="rect">
             <a:avLst/>
@@ -8697,10 +8608,10 @@
       </p:pic>
       <p:pic>
         <p:nvPicPr>
-          <p:cNvPr id="16" name="Picture 15">
-            <a:extLst>
-              <a:ext uri="{FF2B5EF4-FFF2-40B4-BE49-F238E27FC236}">
-                <a16:creationId xmlns:a16="http://schemas.microsoft.com/office/drawing/2014/main" id="{BDAA43E3-03EF-4247-AFBC-6D570F398AF1}"/>
+          <p:cNvPr id="9" name="Picture 8">
+            <a:extLst>
+              <a:ext uri="{FF2B5EF4-FFF2-40B4-BE49-F238E27FC236}">
+                <a16:creationId xmlns:a16="http://schemas.microsoft.com/office/drawing/2014/main" id="{D07B7784-0404-4E89-BFF8-CA73F8907254}"/>
               </a:ext>
             </a:extLst>
           </p:cNvPr>
@@ -8717,8 +8628,8 @@
         </p:blipFill>
         <p:spPr>
           <a:xfrm>
-            <a:off x="9423257" y="1359034"/>
-            <a:ext cx="5721644" cy="5308873"/>
+            <a:off x="372446" y="-10793841"/>
+            <a:ext cx="5505733" cy="5435879"/>
           </a:xfrm>
           <a:prstGeom prst="rect">
             <a:avLst/>
@@ -8727,10 +8638,10 @@
       </p:pic>
       <p:pic>
         <p:nvPicPr>
-          <p:cNvPr id="17" name="Picture 16">
-            <a:extLst>
-              <a:ext uri="{FF2B5EF4-FFF2-40B4-BE49-F238E27FC236}">
-                <a16:creationId xmlns:a16="http://schemas.microsoft.com/office/drawing/2014/main" id="{91B74E2C-F749-47D2-B587-C6BEDC136251}"/>
+          <p:cNvPr id="10" name="Picture 9">
+            <a:extLst>
+              <a:ext uri="{FF2B5EF4-FFF2-40B4-BE49-F238E27FC236}">
+                <a16:creationId xmlns:a16="http://schemas.microsoft.com/office/drawing/2014/main" id="{E60C0387-B2EA-463C-A29C-D56EDE935351}"/>
               </a:ext>
             </a:extLst>
           </p:cNvPr>
@@ -8747,8 +8658,218 @@
         </p:blipFill>
         <p:spPr>
           <a:xfrm>
-            <a:off x="4228690" y="-3823375"/>
-            <a:ext cx="5194567" cy="5366026"/>
+            <a:off x="12564317" y="-10793841"/>
+            <a:ext cx="5499383" cy="5156465"/>
+          </a:xfrm>
+          <a:prstGeom prst="rect">
+            <a:avLst/>
+          </a:prstGeom>
+        </p:spPr>
+      </p:pic>
+      <p:pic>
+        <p:nvPicPr>
+          <p:cNvPr id="13" name="Picture 12">
+            <a:extLst>
+              <a:ext uri="{FF2B5EF4-FFF2-40B4-BE49-F238E27FC236}">
+                <a16:creationId xmlns:a16="http://schemas.microsoft.com/office/drawing/2014/main" id="{E938627B-7830-4C55-8D97-74F53CB5CB34}"/>
+              </a:ext>
+            </a:extLst>
+          </p:cNvPr>
+          <p:cNvPicPr>
+            <a:picLocks noChangeAspect="1"/>
+          </p:cNvPicPr>
+          <p:nvPr/>
+        </p:nvPicPr>
+        <p:blipFill>
+          <a:blip r:embed="rId6"/>
+          <a:stretch>
+            <a:fillRect/>
+          </a:stretch>
+        </p:blipFill>
+        <p:spPr>
+          <a:xfrm>
+            <a:off x="6096000" y="-7805057"/>
+            <a:ext cx="5689892" cy="5486682"/>
+          </a:xfrm>
+          <a:prstGeom prst="rect">
+            <a:avLst/>
+          </a:prstGeom>
+        </p:spPr>
+      </p:pic>
+      <p:pic>
+        <p:nvPicPr>
+          <p:cNvPr id="14" name="Picture 13">
+            <a:extLst>
+              <a:ext uri="{FF2B5EF4-FFF2-40B4-BE49-F238E27FC236}">
+                <a16:creationId xmlns:a16="http://schemas.microsoft.com/office/drawing/2014/main" id="{B818D32E-41C7-4DCB-9F86-7C837750E7C1}"/>
+              </a:ext>
+            </a:extLst>
+          </p:cNvPr>
+          <p:cNvPicPr>
+            <a:picLocks noChangeAspect="1"/>
+          </p:cNvPicPr>
+          <p:nvPr/>
+        </p:nvPicPr>
+        <p:blipFill>
+          <a:blip r:embed="rId7"/>
+          <a:stretch>
+            <a:fillRect/>
+          </a:stretch>
+        </p:blipFill>
+        <p:spPr>
+          <a:xfrm>
+            <a:off x="5750888" y="11883547"/>
+            <a:ext cx="5575587" cy="5473981"/>
+          </a:xfrm>
+          <a:prstGeom prst="rect">
+            <a:avLst/>
+          </a:prstGeom>
+        </p:spPr>
+      </p:pic>
+      <p:pic>
+        <p:nvPicPr>
+          <p:cNvPr id="15" name="Picture 14">
+            <a:extLst>
+              <a:ext uri="{FF2B5EF4-FFF2-40B4-BE49-F238E27FC236}">
+                <a16:creationId xmlns:a16="http://schemas.microsoft.com/office/drawing/2014/main" id="{5128551D-0D10-4C63-8CD9-55D2954145C3}"/>
+              </a:ext>
+            </a:extLst>
+          </p:cNvPr>
+          <p:cNvPicPr>
+            <a:picLocks noChangeAspect="1"/>
+          </p:cNvPicPr>
+          <p:nvPr/>
+        </p:nvPicPr>
+        <p:blipFill>
+          <a:blip r:embed="rId6"/>
+          <a:stretch>
+            <a:fillRect/>
+          </a:stretch>
+        </p:blipFill>
+        <p:spPr>
+          <a:xfrm>
+            <a:off x="6096000" y="-13400596"/>
+            <a:ext cx="5689892" cy="5486682"/>
+          </a:xfrm>
+          <a:prstGeom prst="rect">
+            <a:avLst/>
+          </a:prstGeom>
+        </p:spPr>
+      </p:pic>
+      <p:pic>
+        <p:nvPicPr>
+          <p:cNvPr id="16" name="Picture 15">
+            <a:extLst>
+              <a:ext uri="{FF2B5EF4-FFF2-40B4-BE49-F238E27FC236}">
+                <a16:creationId xmlns:a16="http://schemas.microsoft.com/office/drawing/2014/main" id="{406777F3-B226-49A0-8475-2F7B6C88438E}"/>
+              </a:ext>
+            </a:extLst>
+          </p:cNvPr>
+          <p:cNvPicPr>
+            <a:picLocks noChangeAspect="1"/>
+          </p:cNvPicPr>
+          <p:nvPr/>
+        </p:nvPicPr>
+        <p:blipFill>
+          <a:blip r:embed="rId8"/>
+          <a:stretch>
+            <a:fillRect/>
+          </a:stretch>
+        </p:blipFill>
+        <p:spPr>
+          <a:xfrm>
+            <a:off x="11326475" y="6882786"/>
+            <a:ext cx="5791498" cy="5277121"/>
+          </a:xfrm>
+          <a:prstGeom prst="rect">
+            <a:avLst/>
+          </a:prstGeom>
+        </p:spPr>
+      </p:pic>
+      <p:pic>
+        <p:nvPicPr>
+          <p:cNvPr id="17" name="Picture 16">
+            <a:extLst>
+              <a:ext uri="{FF2B5EF4-FFF2-40B4-BE49-F238E27FC236}">
+                <a16:creationId xmlns:a16="http://schemas.microsoft.com/office/drawing/2014/main" id="{0E74CD7F-B46B-44FA-A600-D6D32D657E70}"/>
+              </a:ext>
+            </a:extLst>
+          </p:cNvPr>
+          <p:cNvPicPr>
+            <a:picLocks noChangeAspect="1"/>
+          </p:cNvPicPr>
+          <p:nvPr/>
+        </p:nvPicPr>
+        <p:blipFill>
+          <a:blip r:embed="rId9"/>
+          <a:stretch>
+            <a:fillRect/>
+          </a:stretch>
+        </p:blipFill>
+        <p:spPr>
+          <a:xfrm>
+            <a:off x="-59661" y="6858000"/>
+            <a:ext cx="5810549" cy="5575587"/>
+          </a:xfrm>
+          <a:prstGeom prst="rect">
+            <a:avLst/>
+          </a:prstGeom>
+        </p:spPr>
+      </p:pic>
+      <p:pic>
+        <p:nvPicPr>
+          <p:cNvPr id="18" name="Picture 17">
+            <a:extLst>
+              <a:ext uri="{FF2B5EF4-FFF2-40B4-BE49-F238E27FC236}">
+                <a16:creationId xmlns:a16="http://schemas.microsoft.com/office/drawing/2014/main" id="{5DDD86D8-265C-426D-8FCE-49A53D7EC1E7}"/>
+              </a:ext>
+            </a:extLst>
+          </p:cNvPr>
+          <p:cNvPicPr>
+            <a:picLocks noChangeAspect="1"/>
+          </p:cNvPicPr>
+          <p:nvPr/>
+        </p:nvPicPr>
+        <p:blipFill>
+          <a:blip r:embed="rId10"/>
+          <a:stretch>
+            <a:fillRect/>
+          </a:stretch>
+        </p:blipFill>
+        <p:spPr>
+          <a:xfrm>
+            <a:off x="3058349" y="-521595"/>
+            <a:ext cx="5385077" cy="5188217"/>
+          </a:xfrm>
+          <a:prstGeom prst="rect">
+            <a:avLst/>
+          </a:prstGeom>
+        </p:spPr>
+      </p:pic>
+      <p:pic>
+        <p:nvPicPr>
+          <p:cNvPr id="19" name="Picture 18">
+            <a:extLst>
+              <a:ext uri="{FF2B5EF4-FFF2-40B4-BE49-F238E27FC236}">
+                <a16:creationId xmlns:a16="http://schemas.microsoft.com/office/drawing/2014/main" id="{8494B7A6-A44A-49A1-84FD-437DBDF6E633}"/>
+              </a:ext>
+            </a:extLst>
+          </p:cNvPr>
+          <p:cNvPicPr>
+            <a:picLocks noChangeAspect="1"/>
+          </p:cNvPicPr>
+          <p:nvPr/>
+        </p:nvPicPr>
+        <p:blipFill>
+          <a:blip r:embed="rId11"/>
+          <a:stretch>
+            <a:fillRect/>
+          </a:stretch>
+        </p:blipFill>
+        <p:spPr>
+          <a:xfrm>
+            <a:off x="8691089" y="-569222"/>
+            <a:ext cx="5270771" cy="5283472"/>
           </a:xfrm>
           <a:prstGeom prst="rect">
             <a:avLst/>
@@ -8758,7 +8879,7 @@
     </p:spTree>
     <p:extLst>
       <p:ext uri="{BB962C8B-B14F-4D97-AF65-F5344CB8AC3E}">
-        <p14:creationId xmlns:p14="http://schemas.microsoft.com/office/powerpoint/2010/main" val="3099745382"/>
+        <p14:creationId xmlns:p14="http://schemas.microsoft.com/office/powerpoint/2010/main" val="2778866111"/>
       </p:ext>
     </p:extLst>
   </p:cSld>
@@ -8787,10 +8908,10 @@
       </p:grpSpPr>
       <p:pic>
         <p:nvPicPr>
-          <p:cNvPr id="5" name="Picture 4">
-            <a:extLst>
-              <a:ext uri="{FF2B5EF4-FFF2-40B4-BE49-F238E27FC236}">
-                <a16:creationId xmlns:a16="http://schemas.microsoft.com/office/drawing/2014/main" id="{6A35CCF6-EAC3-4545-86AD-47DC7C8430A6}"/>
+          <p:cNvPr id="14" name="Picture 13">
+            <a:extLst>
+              <a:ext uri="{FF2B5EF4-FFF2-40B4-BE49-F238E27FC236}">
+                <a16:creationId xmlns:a16="http://schemas.microsoft.com/office/drawing/2014/main" id="{BACD19A8-A57D-419C-9767-7966FB3A95FD}"/>
               </a:ext>
             </a:extLst>
           </p:cNvPr>
@@ -8807,8 +8928,8 @@
         </p:blipFill>
         <p:spPr>
           <a:xfrm>
-            <a:off x="3851142" y="-5537335"/>
-            <a:ext cx="5150115" cy="5232669"/>
+            <a:off x="-965877" y="1498741"/>
+            <a:ext cx="5239019" cy="5169166"/>
           </a:xfrm>
           <a:prstGeom prst="rect">
             <a:avLst/>
@@ -8817,10 +8938,10 @@
       </p:pic>
       <p:pic>
         <p:nvPicPr>
-          <p:cNvPr id="6" name="Picture 5">
-            <a:extLst>
-              <a:ext uri="{FF2B5EF4-FFF2-40B4-BE49-F238E27FC236}">
-                <a16:creationId xmlns:a16="http://schemas.microsoft.com/office/drawing/2014/main" id="{882FC0EA-5672-4DD8-81BA-B732ACEADD89}"/>
+          <p:cNvPr id="15" name="Picture 14">
+            <a:extLst>
+              <a:ext uri="{FF2B5EF4-FFF2-40B4-BE49-F238E27FC236}">
+                <a16:creationId xmlns:a16="http://schemas.microsoft.com/office/drawing/2014/main" id="{69573D0E-52B1-41CC-A3D8-234E8AED5089}"/>
               </a:ext>
             </a:extLst>
           </p:cNvPr>
@@ -8837,8 +8958,8 @@
         </p:blipFill>
         <p:spPr>
           <a:xfrm>
-            <a:off x="-1387877" y="-164959"/>
-            <a:ext cx="5239019" cy="5169166"/>
+            <a:off x="4273142" y="6667907"/>
+            <a:ext cx="5150115" cy="5219968"/>
           </a:xfrm>
           <a:prstGeom prst="rect">
             <a:avLst/>
@@ -8847,10 +8968,10 @@
       </p:pic>
       <p:pic>
         <p:nvPicPr>
-          <p:cNvPr id="7" name="Picture 6">
-            <a:extLst>
-              <a:ext uri="{FF2B5EF4-FFF2-40B4-BE49-F238E27FC236}">
-                <a16:creationId xmlns:a16="http://schemas.microsoft.com/office/drawing/2014/main" id="{B5553593-9546-4C73-9909-9239A63F6226}"/>
+          <p:cNvPr id="16" name="Picture 15">
+            <a:extLst>
+              <a:ext uri="{FF2B5EF4-FFF2-40B4-BE49-F238E27FC236}">
+                <a16:creationId xmlns:a16="http://schemas.microsoft.com/office/drawing/2014/main" id="{BDAA43E3-03EF-4247-AFBC-6D570F398AF1}"/>
               </a:ext>
             </a:extLst>
           </p:cNvPr>
@@ -8867,8 +8988,8 @@
         </p:blipFill>
         <p:spPr>
           <a:xfrm>
-            <a:off x="3851142" y="5004207"/>
-            <a:ext cx="5150115" cy="5219968"/>
+            <a:off x="9423257" y="1359034"/>
+            <a:ext cx="5721644" cy="5308873"/>
           </a:xfrm>
           <a:prstGeom prst="rect">
             <a:avLst/>
@@ -8877,10 +8998,10 @@
       </p:pic>
       <p:pic>
         <p:nvPicPr>
-          <p:cNvPr id="8" name="Picture 7">
-            <a:extLst>
-              <a:ext uri="{FF2B5EF4-FFF2-40B4-BE49-F238E27FC236}">
-                <a16:creationId xmlns:a16="http://schemas.microsoft.com/office/drawing/2014/main" id="{F30FF03F-322D-4C50-99DE-2B9EBF792379}"/>
+          <p:cNvPr id="17" name="Picture 16">
+            <a:extLst>
+              <a:ext uri="{FF2B5EF4-FFF2-40B4-BE49-F238E27FC236}">
+                <a16:creationId xmlns:a16="http://schemas.microsoft.com/office/drawing/2014/main" id="{91B74E2C-F749-47D2-B587-C6BEDC136251}"/>
               </a:ext>
             </a:extLst>
           </p:cNvPr>
@@ -8897,8 +9018,8 @@
         </p:blipFill>
         <p:spPr>
           <a:xfrm>
-            <a:off x="9001257" y="-304666"/>
-            <a:ext cx="5721644" cy="5308873"/>
+            <a:off x="4228690" y="-3823375"/>
+            <a:ext cx="5194567" cy="5366026"/>
           </a:xfrm>
           <a:prstGeom prst="rect">
             <a:avLst/>
@@ -8908,7 +9029,7 @@
     </p:spTree>
     <p:extLst>
       <p:ext uri="{BB962C8B-B14F-4D97-AF65-F5344CB8AC3E}">
-        <p14:creationId xmlns:p14="http://schemas.microsoft.com/office/powerpoint/2010/main" val="3519130227"/>
+        <p14:creationId xmlns:p14="http://schemas.microsoft.com/office/powerpoint/2010/main" val="3099745382"/>
       </p:ext>
     </p:extLst>
   </p:cSld>

--- a/images/bonsai/bonsai.pptx
+++ b/images/bonsai/bonsai.pptx
@@ -20,6 +20,7 @@
     <p:sldId id="267" r:id="rId14"/>
     <p:sldId id="268" r:id="rId15"/>
     <p:sldId id="269" r:id="rId16"/>
+    <p:sldId id="271" r:id="rId17"/>
   </p:sldIdLst>
   <p:sldSz cx="12192000" cy="6858000"/>
   <p:notesSz cx="6858000" cy="9144000"/>
@@ -284,7 +285,7 @@
           <a:p>
             <a:fld id="{3E22E123-1317-4E58-AC6C-4203F2232E49}" type="datetimeFigureOut">
               <a:rPr lang="en-US" smtClean="0"/>
-              <a:t>1/30/2021</a:t>
+              <a:t>2/8/2021</a:t>
             </a:fld>
             <a:endParaRPr lang="en-US"/>
           </a:p>
@@ -482,7 +483,7 @@
           <a:p>
             <a:fld id="{3E22E123-1317-4E58-AC6C-4203F2232E49}" type="datetimeFigureOut">
               <a:rPr lang="en-US" smtClean="0"/>
-              <a:t>1/30/2021</a:t>
+              <a:t>2/8/2021</a:t>
             </a:fld>
             <a:endParaRPr lang="en-US"/>
           </a:p>
@@ -690,7 +691,7 @@
           <a:p>
             <a:fld id="{3E22E123-1317-4E58-AC6C-4203F2232E49}" type="datetimeFigureOut">
               <a:rPr lang="en-US" smtClean="0"/>
-              <a:t>1/30/2021</a:t>
+              <a:t>2/8/2021</a:t>
             </a:fld>
             <a:endParaRPr lang="en-US"/>
           </a:p>
@@ -888,7 +889,7 @@
           <a:p>
             <a:fld id="{3E22E123-1317-4E58-AC6C-4203F2232E49}" type="datetimeFigureOut">
               <a:rPr lang="en-US" smtClean="0"/>
-              <a:t>1/30/2021</a:t>
+              <a:t>2/8/2021</a:t>
             </a:fld>
             <a:endParaRPr lang="en-US"/>
           </a:p>
@@ -1163,7 +1164,7 @@
           <a:p>
             <a:fld id="{3E22E123-1317-4E58-AC6C-4203F2232E49}" type="datetimeFigureOut">
               <a:rPr lang="en-US" smtClean="0"/>
-              <a:t>1/30/2021</a:t>
+              <a:t>2/8/2021</a:t>
             </a:fld>
             <a:endParaRPr lang="en-US"/>
           </a:p>
@@ -1428,7 +1429,7 @@
           <a:p>
             <a:fld id="{3E22E123-1317-4E58-AC6C-4203F2232E49}" type="datetimeFigureOut">
               <a:rPr lang="en-US" smtClean="0"/>
-              <a:t>1/30/2021</a:t>
+              <a:t>2/8/2021</a:t>
             </a:fld>
             <a:endParaRPr lang="en-US"/>
           </a:p>
@@ -1840,7 +1841,7 @@
           <a:p>
             <a:fld id="{3E22E123-1317-4E58-AC6C-4203F2232E49}" type="datetimeFigureOut">
               <a:rPr lang="en-US" smtClean="0"/>
-              <a:t>1/30/2021</a:t>
+              <a:t>2/8/2021</a:t>
             </a:fld>
             <a:endParaRPr lang="en-US"/>
           </a:p>
@@ -1981,7 +1982,7 @@
           <a:p>
             <a:fld id="{3E22E123-1317-4E58-AC6C-4203F2232E49}" type="datetimeFigureOut">
               <a:rPr lang="en-US" smtClean="0"/>
-              <a:t>1/30/2021</a:t>
+              <a:t>2/8/2021</a:t>
             </a:fld>
             <a:endParaRPr lang="en-US"/>
           </a:p>
@@ -2094,7 +2095,7 @@
           <a:p>
             <a:fld id="{3E22E123-1317-4E58-AC6C-4203F2232E49}" type="datetimeFigureOut">
               <a:rPr lang="en-US" smtClean="0"/>
-              <a:t>1/30/2021</a:t>
+              <a:t>2/8/2021</a:t>
             </a:fld>
             <a:endParaRPr lang="en-US"/>
           </a:p>
@@ -2405,7 +2406,7 @@
           <a:p>
             <a:fld id="{3E22E123-1317-4E58-AC6C-4203F2232E49}" type="datetimeFigureOut">
               <a:rPr lang="en-US" smtClean="0"/>
-              <a:t>1/30/2021</a:t>
+              <a:t>2/8/2021</a:t>
             </a:fld>
             <a:endParaRPr lang="en-US"/>
           </a:p>
@@ -2693,7 +2694,7 @@
           <a:p>
             <a:fld id="{3E22E123-1317-4E58-AC6C-4203F2232E49}" type="datetimeFigureOut">
               <a:rPr lang="en-US" smtClean="0"/>
-              <a:t>1/30/2021</a:t>
+              <a:t>2/8/2021</a:t>
             </a:fld>
             <a:endParaRPr lang="en-US"/>
           </a:p>
@@ -2934,7 +2935,7 @@
           <a:p>
             <a:fld id="{3E22E123-1317-4E58-AC6C-4203F2232E49}" type="datetimeFigureOut">
               <a:rPr lang="en-US" smtClean="0"/>
-              <a:t>1/30/2021</a:t>
+              <a:t>2/8/2021</a:t>
             </a:fld>
             <a:endParaRPr lang="en-US"/>
           </a:p>
@@ -6668,6 +6669,108 @@
 </p:sld>
 </file>
 
+<file path=ppt/slides/slide16.xml><?xml version="1.0" encoding="utf-8"?>
+<p:sld xmlns:a="http://schemas.openxmlformats.org/drawingml/2006/main" xmlns:r="http://schemas.openxmlformats.org/officeDocument/2006/relationships" xmlns:p="http://schemas.openxmlformats.org/presentationml/2006/main">
+  <p:cSld>
+    <p:spTree>
+      <p:nvGrpSpPr>
+        <p:cNvPr id="1" name=""/>
+        <p:cNvGrpSpPr/>
+        <p:nvPr/>
+      </p:nvGrpSpPr>
+      <p:grpSpPr>
+        <a:xfrm>
+          <a:off x="0" y="0"/>
+          <a:ext cx="0" cy="0"/>
+          <a:chOff x="0" y="0"/>
+          <a:chExt cx="0" cy="0"/>
+        </a:xfrm>
+      </p:grpSpPr>
+      <p:pic>
+        <p:nvPicPr>
+          <p:cNvPr id="4" name="Picture 3">
+            <a:extLst>
+              <a:ext uri="{FF2B5EF4-FFF2-40B4-BE49-F238E27FC236}">
+                <a16:creationId xmlns:a16="http://schemas.microsoft.com/office/drawing/2014/main" id="{60B6A06C-6BE4-4D66-A8BC-69B20AE76DA7}"/>
+              </a:ext>
+            </a:extLst>
+          </p:cNvPr>
+          <p:cNvPicPr>
+            <a:picLocks noChangeAspect="1"/>
+          </p:cNvPicPr>
+          <p:nvPr/>
+        </p:nvPicPr>
+        <p:blipFill>
+          <a:blip r:embed="rId2"/>
+          <a:stretch>
+            <a:fillRect/>
+          </a:stretch>
+        </p:blipFill>
+        <p:spPr>
+          <a:xfrm>
+            <a:off x="4257580" y="1622332"/>
+            <a:ext cx="3676839" cy="3613336"/>
+          </a:xfrm>
+          <a:prstGeom prst="rect">
+            <a:avLst/>
+          </a:prstGeom>
+        </p:spPr>
+      </p:pic>
+      <p:sp>
+        <p:nvSpPr>
+          <p:cNvPr id="5" name="Rectangle 4">
+            <a:extLst>
+              <a:ext uri="{FF2B5EF4-FFF2-40B4-BE49-F238E27FC236}">
+                <a16:creationId xmlns:a16="http://schemas.microsoft.com/office/drawing/2014/main" id="{6C5D88B4-D7AB-481D-B02C-2CB320D22E5D}"/>
+              </a:ext>
+            </a:extLst>
+          </p:cNvPr>
+          <p:cNvSpPr/>
+          <p:nvPr/>
+        </p:nvSpPr>
+        <p:spPr>
+          <a:xfrm>
+            <a:off x="3161122" y="440951"/>
+            <a:ext cx="6096000" cy="923330"/>
+          </a:xfrm>
+          <a:prstGeom prst="rect">
+            <a:avLst/>
+          </a:prstGeom>
+        </p:spPr>
+        <p:txBody>
+          <a:bodyPr>
+            <a:spAutoFit/>
+          </a:bodyPr>
+          <a:lstStyle/>
+          <a:p>
+            <a:r>
+              <a:rPr lang="en-US" dirty="0"/>
+              <a:t>file:///C:/Github/pedropsi.github.io/bonsai.html?W=6&amp;L=q10q7f1q4w2q2h4q1q7&amp;S=8RDLDDDRRDRRUULD4R4DR7URRD3R13D&amp;G=b&amp;D=2020-02-08&amp;A=Pedro </a:t>
+            </a:r>
+            <a:r>
+              <a:rPr lang="en-US" dirty="0" err="1"/>
+              <a:t>PSi&amp;T</a:t>
+            </a:r>
+            <a:r>
+              <a:rPr lang="en-US" dirty="0"/>
+              <a:t>=Questioning</a:t>
+            </a:r>
+          </a:p>
+        </p:txBody>
+      </p:sp>
+    </p:spTree>
+    <p:extLst>
+      <p:ext uri="{BB962C8B-B14F-4D97-AF65-F5344CB8AC3E}">
+        <p14:creationId xmlns:p14="http://schemas.microsoft.com/office/powerpoint/2010/main" val="2990756614"/>
+      </p:ext>
+    </p:extLst>
+  </p:cSld>
+  <p:clrMapOvr>
+    <a:masterClrMapping/>
+  </p:clrMapOvr>
+</p:sld>
+</file>
+
 <file path=ppt/slides/slide2.xml><?xml version="1.0" encoding="utf-8"?>
 <p:sld xmlns:a="http://schemas.openxmlformats.org/drawingml/2006/main" xmlns:r="http://schemas.openxmlformats.org/officeDocument/2006/relationships" xmlns:p="http://schemas.openxmlformats.org/presentationml/2006/main">
   <p:cSld>

--- a/images/bonsai/bonsai.pptx
+++ b/images/bonsai/bonsai.pptx
@@ -21,6 +21,7 @@
     <p:sldId id="268" r:id="rId15"/>
     <p:sldId id="269" r:id="rId16"/>
     <p:sldId id="271" r:id="rId17"/>
+    <p:sldId id="272" r:id="rId18"/>
   </p:sldIdLst>
   <p:sldSz cx="12192000" cy="6858000"/>
   <p:notesSz cx="6858000" cy="9144000"/>
@@ -285,7 +286,7 @@
           <a:p>
             <a:fld id="{3E22E123-1317-4E58-AC6C-4203F2232E49}" type="datetimeFigureOut">
               <a:rPr lang="en-US" smtClean="0"/>
-              <a:t>2/8/2021</a:t>
+              <a:t>2/12/2021</a:t>
             </a:fld>
             <a:endParaRPr lang="en-US"/>
           </a:p>
@@ -483,7 +484,7 @@
           <a:p>
             <a:fld id="{3E22E123-1317-4E58-AC6C-4203F2232E49}" type="datetimeFigureOut">
               <a:rPr lang="en-US" smtClean="0"/>
-              <a:t>2/8/2021</a:t>
+              <a:t>2/12/2021</a:t>
             </a:fld>
             <a:endParaRPr lang="en-US"/>
           </a:p>
@@ -691,7 +692,7 @@
           <a:p>
             <a:fld id="{3E22E123-1317-4E58-AC6C-4203F2232E49}" type="datetimeFigureOut">
               <a:rPr lang="en-US" smtClean="0"/>
-              <a:t>2/8/2021</a:t>
+              <a:t>2/12/2021</a:t>
             </a:fld>
             <a:endParaRPr lang="en-US"/>
           </a:p>
@@ -889,7 +890,7 @@
           <a:p>
             <a:fld id="{3E22E123-1317-4E58-AC6C-4203F2232E49}" type="datetimeFigureOut">
               <a:rPr lang="en-US" smtClean="0"/>
-              <a:t>2/8/2021</a:t>
+              <a:t>2/12/2021</a:t>
             </a:fld>
             <a:endParaRPr lang="en-US"/>
           </a:p>
@@ -1164,7 +1165,7 @@
           <a:p>
             <a:fld id="{3E22E123-1317-4E58-AC6C-4203F2232E49}" type="datetimeFigureOut">
               <a:rPr lang="en-US" smtClean="0"/>
-              <a:t>2/8/2021</a:t>
+              <a:t>2/12/2021</a:t>
             </a:fld>
             <a:endParaRPr lang="en-US"/>
           </a:p>
@@ -1429,7 +1430,7 @@
           <a:p>
             <a:fld id="{3E22E123-1317-4E58-AC6C-4203F2232E49}" type="datetimeFigureOut">
               <a:rPr lang="en-US" smtClean="0"/>
-              <a:t>2/8/2021</a:t>
+              <a:t>2/12/2021</a:t>
             </a:fld>
             <a:endParaRPr lang="en-US"/>
           </a:p>
@@ -1841,7 +1842,7 @@
           <a:p>
             <a:fld id="{3E22E123-1317-4E58-AC6C-4203F2232E49}" type="datetimeFigureOut">
               <a:rPr lang="en-US" smtClean="0"/>
-              <a:t>2/8/2021</a:t>
+              <a:t>2/12/2021</a:t>
             </a:fld>
             <a:endParaRPr lang="en-US"/>
           </a:p>
@@ -1982,7 +1983,7 @@
           <a:p>
             <a:fld id="{3E22E123-1317-4E58-AC6C-4203F2232E49}" type="datetimeFigureOut">
               <a:rPr lang="en-US" smtClean="0"/>
-              <a:t>2/8/2021</a:t>
+              <a:t>2/12/2021</a:t>
             </a:fld>
             <a:endParaRPr lang="en-US"/>
           </a:p>
@@ -2095,7 +2096,7 @@
           <a:p>
             <a:fld id="{3E22E123-1317-4E58-AC6C-4203F2232E49}" type="datetimeFigureOut">
               <a:rPr lang="en-US" smtClean="0"/>
-              <a:t>2/8/2021</a:t>
+              <a:t>2/12/2021</a:t>
             </a:fld>
             <a:endParaRPr lang="en-US"/>
           </a:p>
@@ -2406,7 +2407,7 @@
           <a:p>
             <a:fld id="{3E22E123-1317-4E58-AC6C-4203F2232E49}" type="datetimeFigureOut">
               <a:rPr lang="en-US" smtClean="0"/>
-              <a:t>2/8/2021</a:t>
+              <a:t>2/12/2021</a:t>
             </a:fld>
             <a:endParaRPr lang="en-US"/>
           </a:p>
@@ -2694,7 +2695,7 @@
           <a:p>
             <a:fld id="{3E22E123-1317-4E58-AC6C-4203F2232E49}" type="datetimeFigureOut">
               <a:rPr lang="en-US" smtClean="0"/>
-              <a:t>2/8/2021</a:t>
+              <a:t>2/12/2021</a:t>
             </a:fld>
             <a:endParaRPr lang="en-US"/>
           </a:p>
@@ -2935,7 +2936,7 @@
           <a:p>
             <a:fld id="{3E22E123-1317-4E58-AC6C-4203F2232E49}" type="datetimeFigureOut">
               <a:rPr lang="en-US" smtClean="0"/>
-              <a:t>2/8/2021</a:t>
+              <a:t>2/12/2021</a:t>
             </a:fld>
             <a:endParaRPr lang="en-US"/>
           </a:p>
@@ -6771,6 +6772,66 @@
 </p:sld>
 </file>
 
+<file path=ppt/slides/slide17.xml><?xml version="1.0" encoding="utf-8"?>
+<p:sld xmlns:a="http://schemas.openxmlformats.org/drawingml/2006/main" xmlns:r="http://schemas.openxmlformats.org/officeDocument/2006/relationships" xmlns:p="http://schemas.openxmlformats.org/presentationml/2006/main">
+  <p:cSld>
+    <p:spTree>
+      <p:nvGrpSpPr>
+        <p:cNvPr id="1" name=""/>
+        <p:cNvGrpSpPr/>
+        <p:nvPr/>
+      </p:nvGrpSpPr>
+      <p:grpSpPr>
+        <a:xfrm>
+          <a:off x="0" y="0"/>
+          <a:ext cx="0" cy="0"/>
+          <a:chOff x="0" y="0"/>
+          <a:chExt cx="0" cy="0"/>
+        </a:xfrm>
+      </p:grpSpPr>
+      <p:pic>
+        <p:nvPicPr>
+          <p:cNvPr id="4" name="Picture 3">
+            <a:extLst>
+              <a:ext uri="{FF2B5EF4-FFF2-40B4-BE49-F238E27FC236}">
+                <a16:creationId xmlns:a16="http://schemas.microsoft.com/office/drawing/2014/main" id="{FC5603A1-22FC-41F4-92B9-5D180B7F1C51}"/>
+              </a:ext>
+            </a:extLst>
+          </p:cNvPr>
+          <p:cNvPicPr>
+            <a:picLocks noChangeAspect="1"/>
+          </p:cNvPicPr>
+          <p:nvPr/>
+        </p:nvPicPr>
+        <p:blipFill>
+          <a:blip r:embed="rId2"/>
+          <a:stretch>
+            <a:fillRect/>
+          </a:stretch>
+        </p:blipFill>
+        <p:spPr>
+          <a:xfrm>
+            <a:off x="4378236" y="1692185"/>
+            <a:ext cx="3435527" cy="3473629"/>
+          </a:xfrm>
+          <a:prstGeom prst="rect">
+            <a:avLst/>
+          </a:prstGeom>
+        </p:spPr>
+      </p:pic>
+    </p:spTree>
+    <p:extLst>
+      <p:ext uri="{BB962C8B-B14F-4D97-AF65-F5344CB8AC3E}">
+        <p14:creationId xmlns:p14="http://schemas.microsoft.com/office/powerpoint/2010/main" val="1467556542"/>
+      </p:ext>
+    </p:extLst>
+  </p:cSld>
+  <p:clrMapOvr>
+    <a:masterClrMapping/>
+  </p:clrMapOvr>
+</p:sld>
+</file>
+
 <file path=ppt/slides/slide2.xml><?xml version="1.0" encoding="utf-8"?>
 <p:sld xmlns:a="http://schemas.openxmlformats.org/drawingml/2006/main" xmlns:r="http://schemas.openxmlformats.org/officeDocument/2006/relationships" xmlns:p="http://schemas.openxmlformats.org/presentationml/2006/main">
   <p:cSld>

--- a/images/bonsai/bonsai.pptx
+++ b/images/bonsai/bonsai.pptx
@@ -6810,7 +6810,7 @@
           </a:stretch>
         </p:blipFill>
         <p:spPr>
-          <a:xfrm>
+          <a:xfrm rot="5400000">
             <a:off x="4378236" y="1692185"/>
             <a:ext cx="3435527" cy="3473629"/>
           </a:xfrm>
